--- a/Proteger sa vie priver  en ligne/vie_privee_en_ligne  -  Réparation.pptx
+++ b/Proteger sa vie priver  en ligne/vie_privee_en_ligne  -  Réparation.pptx
@@ -2934,6 +2934,46 @@
           </a:prstGeom>
         </p:spPr>
       </p:pic>
+      <p:sp>
+        <p:nvSpPr>
+          <p:cNvPr id="8" name="ZoneTexte 7">
+            <a:extLst>
+              <a:ext uri="{FF2B5EF4-FFF2-40B4-BE49-F238E27FC236}">
+                <a16:creationId xmlns:a16="http://schemas.microsoft.com/office/drawing/2014/main" id="{8F3F0B4D-C18C-E502-F600-C0FE1E06F8E6}"/>
+              </a:ext>
+            </a:extLst>
+          </p:cNvPr>
+          <p:cNvSpPr txBox="1"/>
+          <p:nvPr/>
+        </p:nvSpPr>
+        <p:spPr>
+          <a:xfrm>
+            <a:off x="0" y="4864100"/>
+            <a:ext cx="9144000" cy="230832"/>
+          </a:xfrm>
+          <a:prstGeom prst="rect">
+            <a:avLst/>
+          </a:prstGeom>
+          <a:noFill/>
+        </p:spPr>
+        <p:txBody>
+          <a:bodyPr vert="horz" rtlCol="0">
+            <a:spAutoFit/>
+          </a:bodyPr>
+          <a:lstStyle/>
+          <a:p>
+            <a:pPr algn="ctr"/>
+            <a:r>
+              <a:rPr lang="fr-FR" sz="900">
+                <a:solidFill>
+                  <a:srgbClr val="B4B4B4"/>
+                </a:solidFill>
+              </a:rPr>
+              <a:t>(c) titi_23 - mediateur-numerique.github.io - Reproduction interdite sans autorisation</a:t>
+            </a:r>
+          </a:p>
+        </p:txBody>
+      </p:sp>
     </p:spTree>
   </p:cSld>
   <p:clrMapOvr>
@@ -3676,6 +3716,46 @@
           </a:p>
         </p:txBody>
       </p:sp>
+      <p:sp>
+        <p:nvSpPr>
+          <p:cNvPr id="22" name="ZoneTexte 21">
+            <a:extLst>
+              <a:ext uri="{FF2B5EF4-FFF2-40B4-BE49-F238E27FC236}">
+                <a16:creationId xmlns:a16="http://schemas.microsoft.com/office/drawing/2014/main" id="{D051AFB1-E5DB-0F6D-40B0-4A34570F3AD0}"/>
+              </a:ext>
+            </a:extLst>
+          </p:cNvPr>
+          <p:cNvSpPr txBox="1"/>
+          <p:nvPr/>
+        </p:nvSpPr>
+        <p:spPr>
+          <a:xfrm>
+            <a:off x="0" y="4864100"/>
+            <a:ext cx="9144000" cy="230832"/>
+          </a:xfrm>
+          <a:prstGeom prst="rect">
+            <a:avLst/>
+          </a:prstGeom>
+          <a:noFill/>
+        </p:spPr>
+        <p:txBody>
+          <a:bodyPr vert="horz" rtlCol="0">
+            <a:spAutoFit/>
+          </a:bodyPr>
+          <a:lstStyle/>
+          <a:p>
+            <a:pPr algn="ctr"/>
+            <a:r>
+              <a:rPr lang="fr-FR" sz="900">
+                <a:solidFill>
+                  <a:srgbClr val="B4B4B4"/>
+                </a:solidFill>
+              </a:rPr>
+              <a:t>(c) titi_23 - mediateur-numerique.github.io - Reproduction interdite sans autorisation</a:t>
+            </a:r>
+          </a:p>
+        </p:txBody>
+      </p:sp>
     </p:spTree>
   </p:cSld>
   <p:clrMapOvr>
@@ -4342,6 +4422,46 @@
           </a:p>
         </p:txBody>
       </p:sp>
+      <p:sp>
+        <p:nvSpPr>
+          <p:cNvPr id="19" name="ZoneTexte 18">
+            <a:extLst>
+              <a:ext uri="{FF2B5EF4-FFF2-40B4-BE49-F238E27FC236}">
+                <a16:creationId xmlns:a16="http://schemas.microsoft.com/office/drawing/2014/main" id="{AE6503D3-6A64-A745-6A60-D30CF34E5E87}"/>
+              </a:ext>
+            </a:extLst>
+          </p:cNvPr>
+          <p:cNvSpPr txBox="1"/>
+          <p:nvPr/>
+        </p:nvSpPr>
+        <p:spPr>
+          <a:xfrm>
+            <a:off x="0" y="4864100"/>
+            <a:ext cx="9144000" cy="230832"/>
+          </a:xfrm>
+          <a:prstGeom prst="rect">
+            <a:avLst/>
+          </a:prstGeom>
+          <a:noFill/>
+        </p:spPr>
+        <p:txBody>
+          <a:bodyPr vert="horz" rtlCol="0">
+            <a:spAutoFit/>
+          </a:bodyPr>
+          <a:lstStyle/>
+          <a:p>
+            <a:pPr algn="ctr"/>
+            <a:r>
+              <a:rPr lang="fr-FR" sz="900">
+                <a:solidFill>
+                  <a:srgbClr val="B4B4B4"/>
+                </a:solidFill>
+              </a:rPr>
+              <a:t>(c) titi_23 - mediateur-numerique.github.io - Reproduction interdite sans autorisation</a:t>
+            </a:r>
+          </a:p>
+        </p:txBody>
+      </p:sp>
     </p:spTree>
   </p:cSld>
   <p:clrMapOvr>
@@ -5370,6 +5490,46 @@
                 </a:solidFill>
               </a:rPr>
               <a:t>Yggdrasil · Cédric WALTENER · Médiateur Numérique · 2026</a:t>
+            </a:r>
+          </a:p>
+        </p:txBody>
+      </p:sp>
+      <p:sp>
+        <p:nvSpPr>
+          <p:cNvPr id="29" name="ZoneTexte 28">
+            <a:extLst>
+              <a:ext uri="{FF2B5EF4-FFF2-40B4-BE49-F238E27FC236}">
+                <a16:creationId xmlns:a16="http://schemas.microsoft.com/office/drawing/2014/main" id="{7D3B235C-F23F-A16E-A433-EB7289D745CC}"/>
+              </a:ext>
+            </a:extLst>
+          </p:cNvPr>
+          <p:cNvSpPr txBox="1"/>
+          <p:nvPr/>
+        </p:nvSpPr>
+        <p:spPr>
+          <a:xfrm>
+            <a:off x="0" y="4864100"/>
+            <a:ext cx="9144000" cy="230832"/>
+          </a:xfrm>
+          <a:prstGeom prst="rect">
+            <a:avLst/>
+          </a:prstGeom>
+          <a:noFill/>
+        </p:spPr>
+        <p:txBody>
+          <a:bodyPr vert="horz" rtlCol="0">
+            <a:spAutoFit/>
+          </a:bodyPr>
+          <a:lstStyle/>
+          <a:p>
+            <a:pPr algn="ctr"/>
+            <a:r>
+              <a:rPr lang="fr-FR" sz="900">
+                <a:solidFill>
+                  <a:srgbClr val="B4B4B4"/>
+                </a:solidFill>
+              </a:rPr>
+              <a:t>(c) titi_23 - mediateur-numerique.github.io - Reproduction interdite sans autorisation</a:t>
             </a:r>
           </a:p>
         </p:txBody>
@@ -5596,6 +5756,46 @@
           </a:p>
         </p:txBody>
       </p:sp>
+      <p:sp>
+        <p:nvSpPr>
+          <p:cNvPr id="6" name="ZoneTexte 5">
+            <a:extLst>
+              <a:ext uri="{FF2B5EF4-FFF2-40B4-BE49-F238E27FC236}">
+                <a16:creationId xmlns:a16="http://schemas.microsoft.com/office/drawing/2014/main" id="{4A2BCD38-A714-E0AA-5497-7B906BAB77E7}"/>
+              </a:ext>
+            </a:extLst>
+          </p:cNvPr>
+          <p:cNvSpPr txBox="1"/>
+          <p:nvPr/>
+        </p:nvSpPr>
+        <p:spPr>
+          <a:xfrm>
+            <a:off x="0" y="4864100"/>
+            <a:ext cx="9144000" cy="230832"/>
+          </a:xfrm>
+          <a:prstGeom prst="rect">
+            <a:avLst/>
+          </a:prstGeom>
+          <a:noFill/>
+        </p:spPr>
+        <p:txBody>
+          <a:bodyPr vert="horz" rtlCol="0">
+            <a:spAutoFit/>
+          </a:bodyPr>
+          <a:lstStyle/>
+          <a:p>
+            <a:pPr algn="ctr"/>
+            <a:r>
+              <a:rPr lang="fr-FR" sz="900">
+                <a:solidFill>
+                  <a:srgbClr val="B4B4B4"/>
+                </a:solidFill>
+              </a:rPr>
+              <a:t>(c) titi_23 - mediateur-numerique.github.io - Reproduction interdite sans autorisation</a:t>
+            </a:r>
+          </a:p>
+        </p:txBody>
+      </p:sp>
     </p:spTree>
   </p:cSld>
   <p:clrMapOvr>
@@ -6446,6 +6646,46 @@
           </a:p>
         </p:txBody>
       </p:sp>
+      <p:sp>
+        <p:nvSpPr>
+          <p:cNvPr id="25" name="ZoneTexte 24">
+            <a:extLst>
+              <a:ext uri="{FF2B5EF4-FFF2-40B4-BE49-F238E27FC236}">
+                <a16:creationId xmlns:a16="http://schemas.microsoft.com/office/drawing/2014/main" id="{4C8663B5-C262-53CE-DDC1-F819FB9A681F}"/>
+              </a:ext>
+            </a:extLst>
+          </p:cNvPr>
+          <p:cNvSpPr txBox="1"/>
+          <p:nvPr/>
+        </p:nvSpPr>
+        <p:spPr>
+          <a:xfrm>
+            <a:off x="0" y="4864100"/>
+            <a:ext cx="9144000" cy="230832"/>
+          </a:xfrm>
+          <a:prstGeom prst="rect">
+            <a:avLst/>
+          </a:prstGeom>
+          <a:noFill/>
+        </p:spPr>
+        <p:txBody>
+          <a:bodyPr vert="horz" rtlCol="0">
+            <a:spAutoFit/>
+          </a:bodyPr>
+          <a:lstStyle/>
+          <a:p>
+            <a:pPr algn="ctr"/>
+            <a:r>
+              <a:rPr lang="fr-FR" sz="900">
+                <a:solidFill>
+                  <a:srgbClr val="B4B4B4"/>
+                </a:solidFill>
+              </a:rPr>
+              <a:t>(c) titi_23 - mediateur-numerique.github.io - Reproduction interdite sans autorisation</a:t>
+            </a:r>
+          </a:p>
+        </p:txBody>
+      </p:sp>
     </p:spTree>
   </p:cSld>
   <p:clrMapOvr>
@@ -7216,6 +7456,46 @@
           </a:p>
         </p:txBody>
       </p:sp>
+      <p:sp>
+        <p:nvSpPr>
+          <p:cNvPr id="22" name="ZoneTexte 21">
+            <a:extLst>
+              <a:ext uri="{FF2B5EF4-FFF2-40B4-BE49-F238E27FC236}">
+                <a16:creationId xmlns:a16="http://schemas.microsoft.com/office/drawing/2014/main" id="{A7244AC6-280F-FDAD-3A92-974715B460CF}"/>
+              </a:ext>
+            </a:extLst>
+          </p:cNvPr>
+          <p:cNvSpPr txBox="1"/>
+          <p:nvPr/>
+        </p:nvSpPr>
+        <p:spPr>
+          <a:xfrm>
+            <a:off x="0" y="4864100"/>
+            <a:ext cx="9144000" cy="230832"/>
+          </a:xfrm>
+          <a:prstGeom prst="rect">
+            <a:avLst/>
+          </a:prstGeom>
+          <a:noFill/>
+        </p:spPr>
+        <p:txBody>
+          <a:bodyPr vert="horz" rtlCol="0">
+            <a:spAutoFit/>
+          </a:bodyPr>
+          <a:lstStyle/>
+          <a:p>
+            <a:pPr algn="ctr"/>
+            <a:r>
+              <a:rPr lang="fr-FR" sz="900">
+                <a:solidFill>
+                  <a:srgbClr val="B4B4B4"/>
+                </a:solidFill>
+              </a:rPr>
+              <a:t>(c) titi_23 - mediateur-numerique.github.io - Reproduction interdite sans autorisation</a:t>
+            </a:r>
+          </a:p>
+        </p:txBody>
+      </p:sp>
     </p:spTree>
   </p:cSld>
   <p:clrMapOvr>
@@ -7990,6 +8270,46 @@
                 </a:solidFill>
               </a:rPr>
               <a:t>Yggdrasil · Cédric WALTENER · Médiateur Numérique · 2026</a:t>
+            </a:r>
+          </a:p>
+        </p:txBody>
+      </p:sp>
+      <p:sp>
+        <p:nvSpPr>
+          <p:cNvPr id="23" name="ZoneTexte 22">
+            <a:extLst>
+              <a:ext uri="{FF2B5EF4-FFF2-40B4-BE49-F238E27FC236}">
+                <a16:creationId xmlns:a16="http://schemas.microsoft.com/office/drawing/2014/main" id="{EB6A9065-3E46-EA22-25D7-A893EE91E709}"/>
+              </a:ext>
+            </a:extLst>
+          </p:cNvPr>
+          <p:cNvSpPr txBox="1"/>
+          <p:nvPr/>
+        </p:nvSpPr>
+        <p:spPr>
+          <a:xfrm>
+            <a:off x="0" y="4864100"/>
+            <a:ext cx="9144000" cy="230832"/>
+          </a:xfrm>
+          <a:prstGeom prst="rect">
+            <a:avLst/>
+          </a:prstGeom>
+          <a:noFill/>
+        </p:spPr>
+        <p:txBody>
+          <a:bodyPr vert="horz" rtlCol="0">
+            <a:spAutoFit/>
+          </a:bodyPr>
+          <a:lstStyle/>
+          <a:p>
+            <a:pPr algn="ctr"/>
+            <a:r>
+              <a:rPr lang="fr-FR" sz="900">
+                <a:solidFill>
+                  <a:srgbClr val="B4B4B4"/>
+                </a:solidFill>
+              </a:rPr>
+              <a:t>(c) titi_23 - mediateur-numerique.github.io - Reproduction interdite sans autorisation</a:t>
             </a:r>
           </a:p>
         </p:txBody>
@@ -8216,6 +8536,46 @@
           </a:p>
         </p:txBody>
       </p:sp>
+      <p:sp>
+        <p:nvSpPr>
+          <p:cNvPr id="6" name="ZoneTexte 5">
+            <a:extLst>
+              <a:ext uri="{FF2B5EF4-FFF2-40B4-BE49-F238E27FC236}">
+                <a16:creationId xmlns:a16="http://schemas.microsoft.com/office/drawing/2014/main" id="{0779D10C-774A-AC4D-9D32-B01A0CB8BAFD}"/>
+              </a:ext>
+            </a:extLst>
+          </p:cNvPr>
+          <p:cNvSpPr txBox="1"/>
+          <p:nvPr/>
+        </p:nvSpPr>
+        <p:spPr>
+          <a:xfrm>
+            <a:off x="0" y="4864100"/>
+            <a:ext cx="9144000" cy="230832"/>
+          </a:xfrm>
+          <a:prstGeom prst="rect">
+            <a:avLst/>
+          </a:prstGeom>
+          <a:noFill/>
+        </p:spPr>
+        <p:txBody>
+          <a:bodyPr vert="horz" rtlCol="0">
+            <a:spAutoFit/>
+          </a:bodyPr>
+          <a:lstStyle/>
+          <a:p>
+            <a:pPr algn="ctr"/>
+            <a:r>
+              <a:rPr lang="fr-FR" sz="900">
+                <a:solidFill>
+                  <a:srgbClr val="B4B4B4"/>
+                </a:solidFill>
+              </a:rPr>
+              <a:t>(c) titi_23 - mediateur-numerique.github.io - Reproduction interdite sans autorisation</a:t>
+            </a:r>
+          </a:p>
+        </p:txBody>
+      </p:sp>
     </p:spTree>
   </p:cSld>
   <p:clrMapOvr>
@@ -9142,6 +9502,46 @@
           </a:p>
         </p:txBody>
       </p:sp>
+      <p:sp>
+        <p:nvSpPr>
+          <p:cNvPr id="27" name="ZoneTexte 26">
+            <a:extLst>
+              <a:ext uri="{FF2B5EF4-FFF2-40B4-BE49-F238E27FC236}">
+                <a16:creationId xmlns:a16="http://schemas.microsoft.com/office/drawing/2014/main" id="{738633DC-275B-81CA-8BF5-C30975C78A25}"/>
+              </a:ext>
+            </a:extLst>
+          </p:cNvPr>
+          <p:cNvSpPr txBox="1"/>
+          <p:nvPr/>
+        </p:nvSpPr>
+        <p:spPr>
+          <a:xfrm>
+            <a:off x="0" y="4864100"/>
+            <a:ext cx="9144000" cy="230832"/>
+          </a:xfrm>
+          <a:prstGeom prst="rect">
+            <a:avLst/>
+          </a:prstGeom>
+          <a:noFill/>
+        </p:spPr>
+        <p:txBody>
+          <a:bodyPr vert="horz" rtlCol="0">
+            <a:spAutoFit/>
+          </a:bodyPr>
+          <a:lstStyle/>
+          <a:p>
+            <a:pPr algn="ctr"/>
+            <a:r>
+              <a:rPr lang="fr-FR" sz="900">
+                <a:solidFill>
+                  <a:srgbClr val="B4B4B4"/>
+                </a:solidFill>
+              </a:rPr>
+              <a:t>(c) titi_23 - mediateur-numerique.github.io - Reproduction interdite sans autorisation</a:t>
+            </a:r>
+          </a:p>
+        </p:txBody>
+      </p:sp>
     </p:spTree>
   </p:cSld>
   <p:clrMapOvr>
@@ -10180,6 +10580,46 @@
           </a:p>
         </p:txBody>
       </p:sp>
+      <p:sp>
+        <p:nvSpPr>
+          <p:cNvPr id="30" name="ZoneTexte 29">
+            <a:extLst>
+              <a:ext uri="{FF2B5EF4-FFF2-40B4-BE49-F238E27FC236}">
+                <a16:creationId xmlns:a16="http://schemas.microsoft.com/office/drawing/2014/main" id="{46948AE4-4F6E-B8FF-2E98-1B7FC3887D8B}"/>
+              </a:ext>
+            </a:extLst>
+          </p:cNvPr>
+          <p:cNvSpPr txBox="1"/>
+          <p:nvPr/>
+        </p:nvSpPr>
+        <p:spPr>
+          <a:xfrm>
+            <a:off x="0" y="4864100"/>
+            <a:ext cx="9144000" cy="230832"/>
+          </a:xfrm>
+          <a:prstGeom prst="rect">
+            <a:avLst/>
+          </a:prstGeom>
+          <a:noFill/>
+        </p:spPr>
+        <p:txBody>
+          <a:bodyPr vert="horz" rtlCol="0">
+            <a:spAutoFit/>
+          </a:bodyPr>
+          <a:lstStyle/>
+          <a:p>
+            <a:pPr algn="ctr"/>
+            <a:r>
+              <a:rPr lang="fr-FR" sz="900">
+                <a:solidFill>
+                  <a:srgbClr val="B4B4B4"/>
+                </a:solidFill>
+              </a:rPr>
+              <a:t>(c) titi_23 - mediateur-numerique.github.io - Reproduction interdite sans autorisation</a:t>
+            </a:r>
+          </a:p>
+        </p:txBody>
+      </p:sp>
     </p:spTree>
   </p:cSld>
   <p:clrMapOvr>
@@ -10996,6 +11436,46 @@
           </a:p>
         </p:txBody>
       </p:sp>
+      <p:sp>
+        <p:nvSpPr>
+          <p:cNvPr id="23" name="ZoneTexte 22">
+            <a:extLst>
+              <a:ext uri="{FF2B5EF4-FFF2-40B4-BE49-F238E27FC236}">
+                <a16:creationId xmlns:a16="http://schemas.microsoft.com/office/drawing/2014/main" id="{81D923F0-9B4B-86BA-720E-545B893635E7}"/>
+              </a:ext>
+            </a:extLst>
+          </p:cNvPr>
+          <p:cNvSpPr txBox="1"/>
+          <p:nvPr/>
+        </p:nvSpPr>
+        <p:spPr>
+          <a:xfrm>
+            <a:off x="0" y="4864100"/>
+            <a:ext cx="9144000" cy="230832"/>
+          </a:xfrm>
+          <a:prstGeom prst="rect">
+            <a:avLst/>
+          </a:prstGeom>
+          <a:noFill/>
+        </p:spPr>
+        <p:txBody>
+          <a:bodyPr vert="horz" rtlCol="0">
+            <a:spAutoFit/>
+          </a:bodyPr>
+          <a:lstStyle/>
+          <a:p>
+            <a:pPr algn="ctr"/>
+            <a:r>
+              <a:rPr lang="fr-FR" sz="900">
+                <a:solidFill>
+                  <a:srgbClr val="B4B4B4"/>
+                </a:solidFill>
+              </a:rPr>
+              <a:t>(c) titi_23 - mediateur-numerique.github.io - Reproduction interdite sans autorisation</a:t>
+            </a:r>
+          </a:p>
+        </p:txBody>
+      </p:sp>
     </p:spTree>
   </p:cSld>
   <p:clrMapOvr>
@@ -11866,6 +12346,46 @@
                 </a:solidFill>
               </a:rPr>
               <a:t>Yggdrasil · Cédric WALTENER · Médiateur Numérique · 2026</a:t>
+            </a:r>
+          </a:p>
+        </p:txBody>
+      </p:sp>
+      <p:sp>
+        <p:nvSpPr>
+          <p:cNvPr id="25" name="ZoneTexte 24">
+            <a:extLst>
+              <a:ext uri="{FF2B5EF4-FFF2-40B4-BE49-F238E27FC236}">
+                <a16:creationId xmlns:a16="http://schemas.microsoft.com/office/drawing/2014/main" id="{29AD641D-8BC6-6A16-6681-B1E3997215EC}"/>
+              </a:ext>
+            </a:extLst>
+          </p:cNvPr>
+          <p:cNvSpPr txBox="1"/>
+          <p:nvPr/>
+        </p:nvSpPr>
+        <p:spPr>
+          <a:xfrm>
+            <a:off x="0" y="4864100"/>
+            <a:ext cx="9144000" cy="230832"/>
+          </a:xfrm>
+          <a:prstGeom prst="rect">
+            <a:avLst/>
+          </a:prstGeom>
+          <a:noFill/>
+        </p:spPr>
+        <p:txBody>
+          <a:bodyPr vert="horz" rtlCol="0">
+            <a:spAutoFit/>
+          </a:bodyPr>
+          <a:lstStyle/>
+          <a:p>
+            <a:pPr algn="ctr"/>
+            <a:r>
+              <a:rPr lang="fr-FR" sz="900">
+                <a:solidFill>
+                  <a:srgbClr val="B4B4B4"/>
+                </a:solidFill>
+              </a:rPr>
+              <a:t>(c) titi_23 - mediateur-numerique.github.io - Reproduction interdite sans autorisation</a:t>
             </a:r>
           </a:p>
         </p:txBody>
@@ -12092,6 +12612,46 @@
           </a:p>
         </p:txBody>
       </p:sp>
+      <p:sp>
+        <p:nvSpPr>
+          <p:cNvPr id="6" name="ZoneTexte 5">
+            <a:extLst>
+              <a:ext uri="{FF2B5EF4-FFF2-40B4-BE49-F238E27FC236}">
+                <a16:creationId xmlns:a16="http://schemas.microsoft.com/office/drawing/2014/main" id="{499BC25E-F79E-31A1-FD61-9941DB438183}"/>
+              </a:ext>
+            </a:extLst>
+          </p:cNvPr>
+          <p:cNvSpPr txBox="1"/>
+          <p:nvPr/>
+        </p:nvSpPr>
+        <p:spPr>
+          <a:xfrm>
+            <a:off x="0" y="4864100"/>
+            <a:ext cx="9144000" cy="230832"/>
+          </a:xfrm>
+          <a:prstGeom prst="rect">
+            <a:avLst/>
+          </a:prstGeom>
+          <a:noFill/>
+        </p:spPr>
+        <p:txBody>
+          <a:bodyPr vert="horz" rtlCol="0">
+            <a:spAutoFit/>
+          </a:bodyPr>
+          <a:lstStyle/>
+          <a:p>
+            <a:pPr algn="ctr"/>
+            <a:r>
+              <a:rPr lang="fr-FR" sz="900">
+                <a:solidFill>
+                  <a:srgbClr val="B4B4B4"/>
+                </a:solidFill>
+              </a:rPr>
+              <a:t>(c) titi_23 - mediateur-numerique.github.io - Reproduction interdite sans autorisation</a:t>
+            </a:r>
+          </a:p>
+        </p:txBody>
+      </p:sp>
     </p:spTree>
   </p:cSld>
   <p:clrMapOvr>
@@ -12734,6 +13294,46 @@
           </a:p>
         </p:txBody>
       </p:sp>
+      <p:sp>
+        <p:nvSpPr>
+          <p:cNvPr id="19" name="ZoneTexte 18">
+            <a:extLst>
+              <a:ext uri="{FF2B5EF4-FFF2-40B4-BE49-F238E27FC236}">
+                <a16:creationId xmlns:a16="http://schemas.microsoft.com/office/drawing/2014/main" id="{3AC3A9DC-9BE4-AFEF-1770-FB11FA910673}"/>
+              </a:ext>
+            </a:extLst>
+          </p:cNvPr>
+          <p:cNvSpPr txBox="1"/>
+          <p:nvPr/>
+        </p:nvSpPr>
+        <p:spPr>
+          <a:xfrm>
+            <a:off x="0" y="4864100"/>
+            <a:ext cx="9144000" cy="230832"/>
+          </a:xfrm>
+          <a:prstGeom prst="rect">
+            <a:avLst/>
+          </a:prstGeom>
+          <a:noFill/>
+        </p:spPr>
+        <p:txBody>
+          <a:bodyPr vert="horz" rtlCol="0">
+            <a:spAutoFit/>
+          </a:bodyPr>
+          <a:lstStyle/>
+          <a:p>
+            <a:pPr algn="ctr"/>
+            <a:r>
+              <a:rPr lang="fr-FR" sz="900">
+                <a:solidFill>
+                  <a:srgbClr val="B4B4B4"/>
+                </a:solidFill>
+              </a:rPr>
+              <a:t>(c) titi_23 - mediateur-numerique.github.io - Reproduction interdite sans autorisation</a:t>
+            </a:r>
+          </a:p>
+        </p:txBody>
+      </p:sp>
     </p:spTree>
   </p:cSld>
   <p:clrMapOvr>
@@ -13508,6 +14108,46 @@
           </a:p>
         </p:txBody>
       </p:sp>
+      <p:sp>
+        <p:nvSpPr>
+          <p:cNvPr id="22" name="ZoneTexte 21">
+            <a:extLst>
+              <a:ext uri="{FF2B5EF4-FFF2-40B4-BE49-F238E27FC236}">
+                <a16:creationId xmlns:a16="http://schemas.microsoft.com/office/drawing/2014/main" id="{89DA746B-F1FC-099C-B652-57B09E18C97A}"/>
+              </a:ext>
+            </a:extLst>
+          </p:cNvPr>
+          <p:cNvSpPr txBox="1"/>
+          <p:nvPr/>
+        </p:nvSpPr>
+        <p:spPr>
+          <a:xfrm>
+            <a:off x="0" y="4864100"/>
+            <a:ext cx="9144000" cy="230832"/>
+          </a:xfrm>
+          <a:prstGeom prst="rect">
+            <a:avLst/>
+          </a:prstGeom>
+          <a:noFill/>
+        </p:spPr>
+        <p:txBody>
+          <a:bodyPr vert="horz" rtlCol="0">
+            <a:spAutoFit/>
+          </a:bodyPr>
+          <a:lstStyle/>
+          <a:p>
+            <a:pPr algn="ctr"/>
+            <a:r>
+              <a:rPr lang="fr-FR" sz="900">
+                <a:solidFill>
+                  <a:srgbClr val="B4B4B4"/>
+                </a:solidFill>
+              </a:rPr>
+              <a:t>(c) titi_23 - mediateur-numerique.github.io - Reproduction interdite sans autorisation</a:t>
+            </a:r>
+          </a:p>
+        </p:txBody>
+      </p:sp>
     </p:spTree>
   </p:cSld>
   <p:clrMapOvr>
@@ -14410,6 +15050,46 @@
                 </a:solidFill>
               </a:rPr>
               <a:t>Yggdrasil · Cédric WALTENER · Médiateur Numérique · 2026</a:t>
+            </a:r>
+          </a:p>
+        </p:txBody>
+      </p:sp>
+      <p:sp>
+        <p:nvSpPr>
+          <p:cNvPr id="26" name="ZoneTexte 25">
+            <a:extLst>
+              <a:ext uri="{FF2B5EF4-FFF2-40B4-BE49-F238E27FC236}">
+                <a16:creationId xmlns:a16="http://schemas.microsoft.com/office/drawing/2014/main" id="{EFD7BC06-9637-79F1-8E35-325F88131EE5}"/>
+              </a:ext>
+            </a:extLst>
+          </p:cNvPr>
+          <p:cNvSpPr txBox="1"/>
+          <p:nvPr/>
+        </p:nvSpPr>
+        <p:spPr>
+          <a:xfrm>
+            <a:off x="0" y="4864100"/>
+            <a:ext cx="9144000" cy="230832"/>
+          </a:xfrm>
+          <a:prstGeom prst="rect">
+            <a:avLst/>
+          </a:prstGeom>
+          <a:noFill/>
+        </p:spPr>
+        <p:txBody>
+          <a:bodyPr vert="horz" rtlCol="0">
+            <a:spAutoFit/>
+          </a:bodyPr>
+          <a:lstStyle/>
+          <a:p>
+            <a:pPr algn="ctr"/>
+            <a:r>
+              <a:rPr lang="fr-FR" sz="900">
+                <a:solidFill>
+                  <a:srgbClr val="B4B4B4"/>
+                </a:solidFill>
+              </a:rPr>
+              <a:t>(c) titi_23 - mediateur-numerique.github.io - Reproduction interdite sans autorisation</a:t>
             </a:r>
           </a:p>
         </p:txBody>
@@ -14808,6 +15488,46 @@
           </a:p>
         </p:txBody>
       </p:sp>
+      <p:sp>
+        <p:nvSpPr>
+          <p:cNvPr id="11" name="ZoneTexte 10">
+            <a:extLst>
+              <a:ext uri="{FF2B5EF4-FFF2-40B4-BE49-F238E27FC236}">
+                <a16:creationId xmlns:a16="http://schemas.microsoft.com/office/drawing/2014/main" id="{4CE71702-5F5A-F1D7-F967-6FCA0CD42DB3}"/>
+              </a:ext>
+            </a:extLst>
+          </p:cNvPr>
+          <p:cNvSpPr txBox="1"/>
+          <p:nvPr/>
+        </p:nvSpPr>
+        <p:spPr>
+          <a:xfrm>
+            <a:off x="0" y="4864100"/>
+            <a:ext cx="9144000" cy="230832"/>
+          </a:xfrm>
+          <a:prstGeom prst="rect">
+            <a:avLst/>
+          </a:prstGeom>
+          <a:noFill/>
+        </p:spPr>
+        <p:txBody>
+          <a:bodyPr vert="horz" rtlCol="0">
+            <a:spAutoFit/>
+          </a:bodyPr>
+          <a:lstStyle/>
+          <a:p>
+            <a:pPr algn="ctr"/>
+            <a:r>
+              <a:rPr lang="fr-FR" sz="900">
+                <a:solidFill>
+                  <a:srgbClr val="B4B4B4"/>
+                </a:solidFill>
+              </a:rPr>
+              <a:t>(c) titi_23 - mediateur-numerique.github.io - Reproduction interdite sans autorisation</a:t>
+            </a:r>
+          </a:p>
+        </p:txBody>
+      </p:sp>
     </p:spTree>
   </p:cSld>
   <p:clrMapOvr>
@@ -15030,6 +15750,46 @@
           </a:p>
         </p:txBody>
       </p:sp>
+      <p:sp>
+        <p:nvSpPr>
+          <p:cNvPr id="6" name="ZoneTexte 5">
+            <a:extLst>
+              <a:ext uri="{FF2B5EF4-FFF2-40B4-BE49-F238E27FC236}">
+                <a16:creationId xmlns:a16="http://schemas.microsoft.com/office/drawing/2014/main" id="{1F6047BE-1484-B4E5-4C2E-FA9EA972292A}"/>
+              </a:ext>
+            </a:extLst>
+          </p:cNvPr>
+          <p:cNvSpPr txBox="1"/>
+          <p:nvPr/>
+        </p:nvSpPr>
+        <p:spPr>
+          <a:xfrm>
+            <a:off x="0" y="4864100"/>
+            <a:ext cx="9144000" cy="230832"/>
+          </a:xfrm>
+          <a:prstGeom prst="rect">
+            <a:avLst/>
+          </a:prstGeom>
+          <a:noFill/>
+        </p:spPr>
+        <p:txBody>
+          <a:bodyPr vert="horz" rtlCol="0">
+            <a:spAutoFit/>
+          </a:bodyPr>
+          <a:lstStyle/>
+          <a:p>
+            <a:pPr algn="ctr"/>
+            <a:r>
+              <a:rPr lang="fr-FR" sz="900">
+                <a:solidFill>
+                  <a:srgbClr val="B4B4B4"/>
+                </a:solidFill>
+              </a:rPr>
+              <a:t>(c) titi_23 - mediateur-numerique.github.io - Reproduction interdite sans autorisation</a:t>
+            </a:r>
+          </a:p>
+        </p:txBody>
+      </p:sp>
     </p:spTree>
   </p:cSld>
   <p:clrMapOvr>
@@ -16056,6 +16816,46 @@
           </a:p>
         </p:txBody>
       </p:sp>
+      <p:sp>
+        <p:nvSpPr>
+          <p:cNvPr id="29" name="ZoneTexte 28">
+            <a:extLst>
+              <a:ext uri="{FF2B5EF4-FFF2-40B4-BE49-F238E27FC236}">
+                <a16:creationId xmlns:a16="http://schemas.microsoft.com/office/drawing/2014/main" id="{7DA97185-9F88-CB59-CD69-9A476EC15613}"/>
+              </a:ext>
+            </a:extLst>
+          </p:cNvPr>
+          <p:cNvSpPr txBox="1"/>
+          <p:nvPr/>
+        </p:nvSpPr>
+        <p:spPr>
+          <a:xfrm>
+            <a:off x="0" y="4864100"/>
+            <a:ext cx="9144000" cy="230832"/>
+          </a:xfrm>
+          <a:prstGeom prst="rect">
+            <a:avLst/>
+          </a:prstGeom>
+          <a:noFill/>
+        </p:spPr>
+        <p:txBody>
+          <a:bodyPr vert="horz" rtlCol="0">
+            <a:spAutoFit/>
+          </a:bodyPr>
+          <a:lstStyle/>
+          <a:p>
+            <a:pPr algn="ctr"/>
+            <a:r>
+              <a:rPr lang="fr-FR" sz="900">
+                <a:solidFill>
+                  <a:srgbClr val="B4B4B4"/>
+                </a:solidFill>
+              </a:rPr>
+              <a:t>(c) titi_23 - mediateur-numerique.github.io - Reproduction interdite sans autorisation</a:t>
+            </a:r>
+          </a:p>
+        </p:txBody>
+      </p:sp>
     </p:spTree>
   </p:cSld>
   <p:clrMapOvr>
@@ -16670,6 +17470,46 @@
           </a:p>
         </p:txBody>
       </p:sp>
+      <p:sp>
+        <p:nvSpPr>
+          <p:cNvPr id="18" name="ZoneTexte 17">
+            <a:extLst>
+              <a:ext uri="{FF2B5EF4-FFF2-40B4-BE49-F238E27FC236}">
+                <a16:creationId xmlns:a16="http://schemas.microsoft.com/office/drawing/2014/main" id="{FE4B536F-FC2F-BA0B-B33A-083572B34E92}"/>
+              </a:ext>
+            </a:extLst>
+          </p:cNvPr>
+          <p:cNvSpPr txBox="1"/>
+          <p:nvPr/>
+        </p:nvSpPr>
+        <p:spPr>
+          <a:xfrm>
+            <a:off x="0" y="4864100"/>
+            <a:ext cx="9144000" cy="230832"/>
+          </a:xfrm>
+          <a:prstGeom prst="rect">
+            <a:avLst/>
+          </a:prstGeom>
+          <a:noFill/>
+        </p:spPr>
+        <p:txBody>
+          <a:bodyPr vert="horz" rtlCol="0">
+            <a:spAutoFit/>
+          </a:bodyPr>
+          <a:lstStyle/>
+          <a:p>
+            <a:pPr algn="ctr"/>
+            <a:r>
+              <a:rPr lang="fr-FR" sz="900">
+                <a:solidFill>
+                  <a:srgbClr val="B4B4B4"/>
+                </a:solidFill>
+              </a:rPr>
+              <a:t>(c) titi_23 - mediateur-numerique.github.io - Reproduction interdite sans autorisation</a:t>
+            </a:r>
+          </a:p>
+        </p:txBody>
+      </p:sp>
     </p:spTree>
   </p:cSld>
   <p:clrMapOvr>
@@ -17290,6 +18130,46 @@
           </a:p>
         </p:txBody>
       </p:sp>
+      <p:sp>
+        <p:nvSpPr>
+          <p:cNvPr id="18" name="ZoneTexte 17">
+            <a:extLst>
+              <a:ext uri="{FF2B5EF4-FFF2-40B4-BE49-F238E27FC236}">
+                <a16:creationId xmlns:a16="http://schemas.microsoft.com/office/drawing/2014/main" id="{9B55E465-4D23-AC39-2E38-14CD25F4F655}"/>
+              </a:ext>
+            </a:extLst>
+          </p:cNvPr>
+          <p:cNvSpPr txBox="1"/>
+          <p:nvPr/>
+        </p:nvSpPr>
+        <p:spPr>
+          <a:xfrm>
+            <a:off x="0" y="4864100"/>
+            <a:ext cx="9144000" cy="230832"/>
+          </a:xfrm>
+          <a:prstGeom prst="rect">
+            <a:avLst/>
+          </a:prstGeom>
+          <a:noFill/>
+        </p:spPr>
+        <p:txBody>
+          <a:bodyPr vert="horz" rtlCol="0">
+            <a:spAutoFit/>
+          </a:bodyPr>
+          <a:lstStyle/>
+          <a:p>
+            <a:pPr algn="ctr"/>
+            <a:r>
+              <a:rPr lang="fr-FR" sz="900">
+                <a:solidFill>
+                  <a:srgbClr val="B4B4B4"/>
+                </a:solidFill>
+              </a:rPr>
+              <a:t>(c) titi_23 - mediateur-numerique.github.io - Reproduction interdite sans autorisation</a:t>
+            </a:r>
+          </a:p>
+        </p:txBody>
+      </p:sp>
     </p:spTree>
   </p:cSld>
   <p:clrMapOvr>
@@ -18012,6 +18892,46 @@
                 </a:solidFill>
               </a:rPr>
               <a:t>Yggdrasil · Cédric WALTENER · Médiateur Numérique · 2026</a:t>
+            </a:r>
+          </a:p>
+        </p:txBody>
+      </p:sp>
+      <p:sp>
+        <p:nvSpPr>
+          <p:cNvPr id="21" name="ZoneTexte 20">
+            <a:extLst>
+              <a:ext uri="{FF2B5EF4-FFF2-40B4-BE49-F238E27FC236}">
+                <a16:creationId xmlns:a16="http://schemas.microsoft.com/office/drawing/2014/main" id="{3D550511-3460-1E82-8BA4-1F40F07FEB1F}"/>
+              </a:ext>
+            </a:extLst>
+          </p:cNvPr>
+          <p:cNvSpPr txBox="1"/>
+          <p:nvPr/>
+        </p:nvSpPr>
+        <p:spPr>
+          <a:xfrm>
+            <a:off x="0" y="4864100"/>
+            <a:ext cx="9144000" cy="230832"/>
+          </a:xfrm>
+          <a:prstGeom prst="rect">
+            <a:avLst/>
+          </a:prstGeom>
+          <a:noFill/>
+        </p:spPr>
+        <p:txBody>
+          <a:bodyPr vert="horz" rtlCol="0">
+            <a:spAutoFit/>
+          </a:bodyPr>
+          <a:lstStyle/>
+          <a:p>
+            <a:pPr algn="ctr"/>
+            <a:r>
+              <a:rPr lang="fr-FR" sz="900">
+                <a:solidFill>
+                  <a:srgbClr val="B4B4B4"/>
+                </a:solidFill>
+              </a:rPr>
+              <a:t>(c) titi_23 - mediateur-numerique.github.io - Reproduction interdite sans autorisation</a:t>
             </a:r>
           </a:p>
         </p:txBody>
@@ -18238,6 +19158,46 @@
           </a:p>
         </p:txBody>
       </p:sp>
+      <p:sp>
+        <p:nvSpPr>
+          <p:cNvPr id="6" name="ZoneTexte 5">
+            <a:extLst>
+              <a:ext uri="{FF2B5EF4-FFF2-40B4-BE49-F238E27FC236}">
+                <a16:creationId xmlns:a16="http://schemas.microsoft.com/office/drawing/2014/main" id="{C65D4C6D-F397-3360-DFAE-11F631A22470}"/>
+              </a:ext>
+            </a:extLst>
+          </p:cNvPr>
+          <p:cNvSpPr txBox="1"/>
+          <p:nvPr/>
+        </p:nvSpPr>
+        <p:spPr>
+          <a:xfrm>
+            <a:off x="0" y="4864100"/>
+            <a:ext cx="9144000" cy="230832"/>
+          </a:xfrm>
+          <a:prstGeom prst="rect">
+            <a:avLst/>
+          </a:prstGeom>
+          <a:noFill/>
+        </p:spPr>
+        <p:txBody>
+          <a:bodyPr vert="horz" rtlCol="0">
+            <a:spAutoFit/>
+          </a:bodyPr>
+          <a:lstStyle/>
+          <a:p>
+            <a:pPr algn="ctr"/>
+            <a:r>
+              <a:rPr lang="fr-FR" sz="900">
+                <a:solidFill>
+                  <a:srgbClr val="B4B4B4"/>
+                </a:solidFill>
+              </a:rPr>
+              <a:t>(c) titi_23 - mediateur-numerique.github.io - Reproduction interdite sans autorisation</a:t>
+            </a:r>
+          </a:p>
+        </p:txBody>
+      </p:sp>
     </p:spTree>
   </p:cSld>
   <p:clrMapOvr>
@@ -20016,6 +20976,46 @@
                 </a:solidFill>
               </a:rPr>
               <a:t>Yggdrasil · Cédric WALTENER · Médiateur Numérique · 2026</a:t>
+            </a:r>
+          </a:p>
+        </p:txBody>
+      </p:sp>
+      <p:sp>
+        <p:nvSpPr>
+          <p:cNvPr id="53" name="ZoneTexte 52">
+            <a:extLst>
+              <a:ext uri="{FF2B5EF4-FFF2-40B4-BE49-F238E27FC236}">
+                <a16:creationId xmlns:a16="http://schemas.microsoft.com/office/drawing/2014/main" id="{BDA49CA2-45AE-A4E1-A868-40E3378A296C}"/>
+              </a:ext>
+            </a:extLst>
+          </p:cNvPr>
+          <p:cNvSpPr txBox="1"/>
+          <p:nvPr/>
+        </p:nvSpPr>
+        <p:spPr>
+          <a:xfrm>
+            <a:off x="0" y="4864100"/>
+            <a:ext cx="9144000" cy="230832"/>
+          </a:xfrm>
+          <a:prstGeom prst="rect">
+            <a:avLst/>
+          </a:prstGeom>
+          <a:noFill/>
+        </p:spPr>
+        <p:txBody>
+          <a:bodyPr vert="horz" rtlCol="0">
+            <a:spAutoFit/>
+          </a:bodyPr>
+          <a:lstStyle/>
+          <a:p>
+            <a:pPr algn="ctr"/>
+            <a:r>
+              <a:rPr lang="fr-FR" sz="900">
+                <a:solidFill>
+                  <a:srgbClr val="B4B4B4"/>
+                </a:solidFill>
+              </a:rPr>
+              <a:t>(c) titi_23 - mediateur-numerique.github.io - Reproduction interdite sans autorisation</a:t>
             </a:r>
           </a:p>
         </p:txBody>
